--- a/홈스타일_조합상품_3D규격_고객결정안_2026-07-28.pptx
+++ b/홈스타일_조합상품_3D규격_고객결정안_2026-07-28.pptx
@@ -4906,13 +4906,220 @@
           <a:p>
             <a:pPr algn="l"/>
             <a:r>
-              <a:rPr sz="1019" b="1">
+              <a:rPr sz="1019" b="1" dirty="0" err="1">
                 <a:solidFill>
                   <a:srgbClr val="202124"/>
                 </a:solidFill>
                 <a:latin typeface="맑은 고딕"/>
               </a:rPr>
-              <a:t>조립 후 독립적으로 움직이지 않는 상판과 다리를 별도 Asset으로 전달할 필요가 있는지 결정합니다.</a:t>
+              <a:t>조립</a:t>
+            </a:r>
+            <a:r>
+              <a:rPr sz="1019" b="1" dirty="0">
+                <a:solidFill>
+                  <a:srgbClr val="202124"/>
+                </a:solidFill>
+                <a:latin typeface="맑은 고딕"/>
+              </a:rPr>
+              <a:t> 후 </a:t>
+            </a:r>
+            <a:r>
+              <a:rPr sz="1019" b="1" dirty="0" err="1">
+                <a:solidFill>
+                  <a:srgbClr val="202124"/>
+                </a:solidFill>
+                <a:latin typeface="맑은 고딕"/>
+              </a:rPr>
+              <a:t>독립적으로</a:t>
+            </a:r>
+            <a:r>
+              <a:rPr sz="1019" b="1" dirty="0">
+                <a:solidFill>
+                  <a:srgbClr val="202124"/>
+                </a:solidFill>
+                <a:latin typeface="맑은 고딕"/>
+              </a:rPr>
+              <a:t> </a:t>
+            </a:r>
+            <a:r>
+              <a:rPr sz="1019" b="1" dirty="0" err="1">
+                <a:solidFill>
+                  <a:srgbClr val="202124"/>
+                </a:solidFill>
+                <a:latin typeface="맑은 고딕"/>
+              </a:rPr>
+              <a:t>움직이지</a:t>
+            </a:r>
+            <a:r>
+              <a:rPr sz="1019" b="1" dirty="0">
+                <a:solidFill>
+                  <a:srgbClr val="202124"/>
+                </a:solidFill>
+                <a:latin typeface="맑은 고딕"/>
+              </a:rPr>
+              <a:t> </a:t>
+            </a:r>
+            <a:r>
+              <a:rPr sz="1019" b="1" dirty="0" err="1">
+                <a:solidFill>
+                  <a:srgbClr val="202124"/>
+                </a:solidFill>
+                <a:latin typeface="맑은 고딕"/>
+              </a:rPr>
+              <a:t>않는</a:t>
+            </a:r>
+            <a:r>
+              <a:rPr sz="1019" b="1" dirty="0">
+                <a:solidFill>
+                  <a:srgbClr val="202124"/>
+                </a:solidFill>
+                <a:latin typeface="맑은 고딕"/>
+              </a:rPr>
+              <a:t> </a:t>
+            </a:r>
+            <a:r>
+              <a:rPr sz="1019" b="1" dirty="0" err="1">
+                <a:solidFill>
+                  <a:srgbClr val="202124"/>
+                </a:solidFill>
+                <a:latin typeface="맑은 고딕"/>
+              </a:rPr>
+              <a:t>상판과</a:t>
+            </a:r>
+            <a:r>
+              <a:rPr sz="1019" b="1" dirty="0">
+                <a:solidFill>
+                  <a:srgbClr val="202124"/>
+                </a:solidFill>
+                <a:latin typeface="맑은 고딕"/>
+              </a:rPr>
+              <a:t> </a:t>
+            </a:r>
+            <a:r>
+              <a:rPr sz="1019" b="1" dirty="0" err="1">
+                <a:solidFill>
+                  <a:srgbClr val="202124"/>
+                </a:solidFill>
+                <a:latin typeface="맑은 고딕"/>
+              </a:rPr>
+              <a:t>다리를</a:t>
+            </a:r>
+            <a:r>
+              <a:rPr sz="1019" b="1" dirty="0">
+                <a:solidFill>
+                  <a:srgbClr val="202124"/>
+                </a:solidFill>
+                <a:latin typeface="맑은 고딕"/>
+              </a:rPr>
+              <a:t> </a:t>
+            </a:r>
+            <a:r>
+              <a:rPr sz="1019" b="1" dirty="0" err="1">
+                <a:solidFill>
+                  <a:srgbClr val="202124"/>
+                </a:solidFill>
+                <a:latin typeface="맑은 고딕"/>
+              </a:rPr>
+              <a:t>별도</a:t>
+            </a:r>
+            <a:r>
+              <a:rPr sz="1019" b="1" dirty="0">
+                <a:solidFill>
+                  <a:srgbClr val="202124"/>
+                </a:solidFill>
+                <a:latin typeface="맑은 고딕"/>
+              </a:rPr>
+              <a:t> </a:t>
+            </a:r>
+            <a:r>
+              <a:rPr sz="1019" b="1" dirty="0" err="1">
+                <a:solidFill>
+                  <a:srgbClr val="202124"/>
+                </a:solidFill>
+                <a:latin typeface="맑은 고딕"/>
+              </a:rPr>
+              <a:t>Asset으로</a:t>
+            </a:r>
+            <a:r>
+              <a:rPr sz="1019" b="1" dirty="0">
+                <a:solidFill>
+                  <a:srgbClr val="202124"/>
+                </a:solidFill>
+                <a:latin typeface="맑은 고딕"/>
+              </a:rPr>
+              <a:t> </a:t>
+            </a:r>
+            <a:r>
+              <a:rPr sz="1019" b="1" dirty="0" err="1">
+                <a:solidFill>
+                  <a:srgbClr val="202124"/>
+                </a:solidFill>
+                <a:latin typeface="맑은 고딕"/>
+              </a:rPr>
+              <a:t>전달할</a:t>
+            </a:r>
+            <a:r>
+              <a:rPr sz="1019" b="1" dirty="0">
+                <a:solidFill>
+                  <a:srgbClr val="202124"/>
+                </a:solidFill>
+                <a:latin typeface="맑은 고딕"/>
+              </a:rPr>
+              <a:t> </a:t>
+            </a:r>
+            <a:r>
+              <a:rPr sz="1019" b="1" dirty="0" err="1">
+                <a:solidFill>
+                  <a:srgbClr val="202124"/>
+                </a:solidFill>
+                <a:latin typeface="맑은 고딕"/>
+              </a:rPr>
+              <a:t>필요가</a:t>
+            </a:r>
+            <a:r>
+              <a:rPr sz="1019" b="1" dirty="0">
+                <a:solidFill>
+                  <a:srgbClr val="202124"/>
+                </a:solidFill>
+                <a:latin typeface="맑은 고딕"/>
+              </a:rPr>
+              <a:t> </a:t>
+            </a:r>
+            <a:r>
+              <a:rPr sz="1019" b="1" dirty="0" err="1">
+                <a:solidFill>
+                  <a:srgbClr val="202124"/>
+                </a:solidFill>
+                <a:latin typeface="맑은 고딕"/>
+              </a:rPr>
+              <a:t>있는지</a:t>
+            </a:r>
+            <a:r>
+              <a:rPr sz="1019" b="1" dirty="0">
+                <a:solidFill>
+                  <a:srgbClr val="202124"/>
+                </a:solidFill>
+                <a:latin typeface="맑은 고딕"/>
+              </a:rPr>
+              <a:t> </a:t>
+            </a:r>
+            <a:r>
+              <a:rPr sz="1019" b="1" dirty="0" err="1">
+                <a:solidFill>
+                  <a:srgbClr val="202124"/>
+                </a:solidFill>
+                <a:latin typeface="맑은 고딕"/>
+              </a:rPr>
+              <a:t>결정합니다</a:t>
+            </a:r>
+            <a:r>
+              <a:rPr sz="1019" b="1" dirty="0">
+                <a:solidFill>
+                  <a:srgbClr val="202124"/>
+                </a:solidFill>
+                <a:latin typeface="맑은 고딕"/>
+              </a:rPr>
+              <a:t>.</a:t>
             </a:r>
           </a:p>
         </p:txBody>
@@ -17714,7 +17921,7 @@
           <a:p>
             <a:pPr algn="l"/>
             <a:r>
-              <a:rPr sz="1019" b="1">
+              <a:rPr sz="1019" b="1" dirty="0" err="1">
                 <a:solidFill>
                   <a:srgbClr val="202124"/>
                 </a:solidFill>
@@ -26324,13 +26531,202 @@
           <a:p>
             <a:pPr algn="l"/>
             <a:r>
-              <a:rPr sz="1019" b="1">
+              <a:rPr sz="1019" b="1" dirty="0" err="1">
                 <a:solidFill>
                   <a:srgbClr val="202124"/>
                 </a:solidFill>
                 <a:latin typeface="맑은 고딕"/>
               </a:rPr>
-              <a:t>본체에 고정되는 가드와 독립 이동 가능한 책상·수납장을 같은 방식으로 처리할 수 없습니다.</a:t>
+              <a:t>본체에</a:t>
+            </a:r>
+            <a:r>
+              <a:rPr sz="1019" b="1" dirty="0">
+                <a:solidFill>
+                  <a:srgbClr val="202124"/>
+                </a:solidFill>
+                <a:latin typeface="맑은 고딕"/>
+              </a:rPr>
+              <a:t> </a:t>
+            </a:r>
+            <a:r>
+              <a:rPr sz="1019" b="1" dirty="0" err="1">
+                <a:solidFill>
+                  <a:srgbClr val="202124"/>
+                </a:solidFill>
+                <a:latin typeface="맑은 고딕"/>
+              </a:rPr>
+              <a:t>고정되는</a:t>
+            </a:r>
+            <a:r>
+              <a:rPr sz="1019" b="1" dirty="0">
+                <a:solidFill>
+                  <a:srgbClr val="202124"/>
+                </a:solidFill>
+                <a:latin typeface="맑은 고딕"/>
+              </a:rPr>
+              <a:t> </a:t>
+            </a:r>
+            <a:r>
+              <a:rPr sz="1019" b="1" dirty="0" err="1">
+                <a:solidFill>
+                  <a:srgbClr val="202124"/>
+                </a:solidFill>
+                <a:latin typeface="맑은 고딕"/>
+              </a:rPr>
+              <a:t>가드와</a:t>
+            </a:r>
+            <a:r>
+              <a:rPr sz="1019" b="1" dirty="0">
+                <a:solidFill>
+                  <a:srgbClr val="202124"/>
+                </a:solidFill>
+                <a:latin typeface="맑은 고딕"/>
+              </a:rPr>
+              <a:t> </a:t>
+            </a:r>
+            <a:r>
+              <a:rPr sz="1019" b="1" dirty="0" err="1">
+                <a:solidFill>
+                  <a:srgbClr val="202124"/>
+                </a:solidFill>
+                <a:latin typeface="맑은 고딕"/>
+              </a:rPr>
+              <a:t>독립</a:t>
+            </a:r>
+            <a:r>
+              <a:rPr sz="1019" b="1" dirty="0">
+                <a:solidFill>
+                  <a:srgbClr val="202124"/>
+                </a:solidFill>
+                <a:latin typeface="맑은 고딕"/>
+              </a:rPr>
+              <a:t> </a:t>
+            </a:r>
+            <a:r>
+              <a:rPr sz="1019" b="1" dirty="0" err="1">
+                <a:solidFill>
+                  <a:srgbClr val="202124"/>
+                </a:solidFill>
+                <a:latin typeface="맑은 고딕"/>
+              </a:rPr>
+              <a:t>이동</a:t>
+            </a:r>
+            <a:r>
+              <a:rPr sz="1019" b="1" dirty="0">
+                <a:solidFill>
+                  <a:srgbClr val="202124"/>
+                </a:solidFill>
+                <a:latin typeface="맑은 고딕"/>
+              </a:rPr>
+              <a:t> </a:t>
+            </a:r>
+            <a:r>
+              <a:rPr sz="1019" b="1" dirty="0" err="1">
+                <a:solidFill>
+                  <a:srgbClr val="202124"/>
+                </a:solidFill>
+                <a:latin typeface="맑은 고딕"/>
+              </a:rPr>
+              <a:t>가능한</a:t>
+            </a:r>
+            <a:r>
+              <a:rPr sz="1019" b="1" dirty="0">
+                <a:solidFill>
+                  <a:srgbClr val="202124"/>
+                </a:solidFill>
+                <a:latin typeface="맑은 고딕"/>
+              </a:rPr>
+              <a:t> </a:t>
+            </a:r>
+            <a:r>
+              <a:rPr sz="1019" b="1" dirty="0" err="1">
+                <a:solidFill>
+                  <a:srgbClr val="202124"/>
+                </a:solidFill>
+                <a:latin typeface="맑은 고딕"/>
+              </a:rPr>
+              <a:t>책상·수납장을</a:t>
+            </a:r>
+            <a:r>
+              <a:rPr sz="1019" b="1" dirty="0">
+                <a:solidFill>
+                  <a:srgbClr val="202124"/>
+                </a:solidFill>
+                <a:latin typeface="맑은 고딕"/>
+              </a:rPr>
+              <a:t> </a:t>
+            </a:r>
+            <a:r>
+              <a:rPr sz="1019" b="1" dirty="0" err="1">
+                <a:solidFill>
+                  <a:srgbClr val="202124"/>
+                </a:solidFill>
+                <a:latin typeface="맑은 고딕"/>
+              </a:rPr>
+              <a:t>같은</a:t>
+            </a:r>
+            <a:r>
+              <a:rPr sz="1019" b="1" dirty="0">
+                <a:solidFill>
+                  <a:srgbClr val="202124"/>
+                </a:solidFill>
+                <a:latin typeface="맑은 고딕"/>
+              </a:rPr>
+              <a:t> </a:t>
+            </a:r>
+            <a:r>
+              <a:rPr sz="1019" b="1" dirty="0" err="1">
+                <a:solidFill>
+                  <a:srgbClr val="202124"/>
+                </a:solidFill>
+                <a:latin typeface="맑은 고딕"/>
+              </a:rPr>
+              <a:t>방식으로</a:t>
+            </a:r>
+            <a:r>
+              <a:rPr sz="1019" b="1" dirty="0">
+                <a:solidFill>
+                  <a:srgbClr val="202124"/>
+                </a:solidFill>
+                <a:latin typeface="맑은 고딕"/>
+              </a:rPr>
+              <a:t> </a:t>
+            </a:r>
+            <a:r>
+              <a:rPr sz="1019" b="1" dirty="0" err="1">
+                <a:solidFill>
+                  <a:srgbClr val="202124"/>
+                </a:solidFill>
+                <a:latin typeface="맑은 고딕"/>
+              </a:rPr>
+              <a:t>처리할</a:t>
+            </a:r>
+            <a:r>
+              <a:rPr sz="1019" b="1" dirty="0">
+                <a:solidFill>
+                  <a:srgbClr val="202124"/>
+                </a:solidFill>
+                <a:latin typeface="맑은 고딕"/>
+              </a:rPr>
+              <a:t> 수 </a:t>
+            </a:r>
+            <a:r>
+              <a:rPr sz="1019" b="1" dirty="0" err="1">
+                <a:solidFill>
+                  <a:srgbClr val="202124"/>
+                </a:solidFill>
+                <a:latin typeface="맑은 고딕"/>
+              </a:rPr>
+              <a:t>없습니다</a:t>
+            </a:r>
+            <a:r>
+              <a:rPr sz="1019" b="1" dirty="0">
+                <a:solidFill>
+                  <a:srgbClr val="202124"/>
+                </a:solidFill>
+                <a:latin typeface="맑은 고딕"/>
+              </a:rPr>
+              <a:t>.</a:t>
             </a:r>
           </a:p>
         </p:txBody>
